--- a/carpentry/intake-142/PowerPoint/Day-16_2026-11-26_Week-5.pptx
+++ b/carpentry/intake-142/PowerPoint/Day-16_2026-11-26_Week-5.pptx
@@ -776,7 +776,7 @@
           <a:p/>
           <a:p>
             <a:r>
-              <a:t>Imagine a rectangular panel drawing with the area filled in and the width left blank. The question mark is a length, even though the information we start with is an area. Point to the known quantity and then the quantity you need. What units would the unknown width have if the drawing uses centimetres? Centimetres, not square centimetres. Today we will use the textbook, pages 131 to 134, to choose the inverse operation and then substitute the dimension back into the area formula.</a:t>
+              <a:t>Imagine a rectangular panel drawing with the area filled in and the width left blank. The question mark is a length, even though the information we start with is an area. Point to the known quantity and then the quantity you need. What units would the unknown width have if the drawing uses centimetres? Centimetres, not square centimetres. Today we will use the textbook, pages 200 to 204, to choose the inverse operation and then substitute the dimension back into the area formula.</a:t>
             </a:r>
           </a:p>
         </p:txBody>
@@ -1080,7 +1080,7 @@
           <a:p/>
           <a:p>
             <a:r>
-              <a:t>In Figure 8.3 on page 132, follow the square sides: 10 centimetres, 20 centimetres and 30 centimetres. Their areas are 100, 400 and 900 square centimetres. Doubling the side multiplies the area by four, because both directions double. Tripling the side multiplies the area by nine. If the area becomes four times as large, does the side become four times as large? No, it becomes twice as large. This picture explains why we use a square root when we know the area: we are recovering the single side from two equal factors.</a:t>
+              <a:t>In Figure 8.3 on page 201, follow the square sides: 10 centimetres, 20 centimetres and 30 centimetres. Their areas are 100, 400 and 900 square centimetres. Doubling the side multiplies the area by four, because both directions double. Tripling the side multiplies the area by nine. If the area becomes four times as large, does the side become four times as large? No, it becomes twice as large. This picture explains why we use a square root when we know the area: we are recovering the single side from two equal factors.</a:t>
             </a:r>
           </a:p>
         </p:txBody>
@@ -1156,7 +1156,7 @@
           <a:p/>
           <a:p>
             <a:r>
-              <a:t>Example 8.11 starts with a square plate of 62,500 square millimetres. We write s equals the square root of 62,500, giving 250 millimetres. Check it aloud: 250 times 250 equals 62,500. Notice the calculator sequence in the continuation on page 132. On the TI-30Xa, enter 62500 and then the square-root key. On the Sharp EL-531XT, press the square-root key, enter 62500, then equals. The mathematical operation is identical even though the key order differs. What must the display show for either method? 250, which we label millimetres.</a:t>
+              <a:t>Example 8.11 starts with a square plate of 62,500 square millimetres. We write s equals the square root of 62,500, giving 250 millimetres. Check it aloud: 250 times 250 equals 62,500. Notice the calculator sequence in the continuation on pages 201–202. On the TI-30Xa, enter 62500 and then the square-root key. On the Sharp EL-531XT, press the square-root key, enter 62500, then equals. The mathematical operation is identical even though the key order differs. What must the display show for either method? 250, which we label millimetres.</a:t>
             </a:r>
           </a:p>
         </p:txBody>
@@ -3641,7 +3641,7 @@
                 </a:solidFill>
                 <a:latin typeface="Arial"/>
               </a:rPr>
-              <a:t>Textbook sections 8.6 pp.131–133; sections 8.7 p.134; calculator pp.31–33</a:t>
+              <a:t>Textbook sections 8.6 pp.201–203; sections 8.7 pp.203–204; calculator pp.51–53</a:t>
             </a:r>
           </a:p>
         </p:txBody>
@@ -4399,7 +4399,7 @@
                 </a:solidFill>
                 <a:latin typeface="Arial"/>
               </a:rPr>
-              <a:t>Textbook sections 8.6 pp.131–133; sections 8.7 p.134; calculator pp.31–33</a:t>
+              <a:t>Textbook sections 8.6 pp.201–203; sections 8.7 pp.203–204; calculator pp.51–53</a:t>
             </a:r>
           </a:p>
         </p:txBody>
@@ -4599,7 +4599,7 @@
                 </a:solidFill>
                 <a:latin typeface="Arial"/>
               </a:rPr>
-              <a:t>Resources: Exercise Book 8A Q23–24 (p.52); 8B Q6,13 (pp.53–54); 8C Q1–4 (p.55)</a:t>
+              <a:t>Resources: Exercise Book 8A Q23–24 (p.78); 8B Q6,13 (pp.79–80); 8C Q1–4 (p.81)</a:t>
             </a:r>
           </a:p>
         </p:txBody>
@@ -5213,7 +5213,7 @@
                 </a:solidFill>
                 <a:latin typeface="Arial"/>
               </a:rPr>
-              <a:t>Textbook sections 8.6 pp.131–133; sections 8.7 p.134; calculator pp.31–33</a:t>
+              <a:t>Textbook sections 8.6 pp.201–203; sections 8.7 pp.203–204; calculator pp.51–53</a:t>
             </a:r>
           </a:p>
         </p:txBody>
@@ -5969,7 +5969,7 @@
                 </a:solidFill>
                 <a:latin typeface="Arial"/>
               </a:rPr>
-              <a:t>Textbook sections 8.6 pp.131–133; sections 8.7 p.134; calculator pp.31–33</a:t>
+              <a:t>Textbook sections 8.6 pp.201–203; sections 8.7 pp.203–204; calculator pp.51–53</a:t>
             </a:r>
           </a:p>
         </p:txBody>
@@ -6703,7 +6703,7 @@
                 </a:solidFill>
                 <a:latin typeface="Arial"/>
               </a:rPr>
-              <a:t>Textbook sections 8.6 pp.131–133; sections 8.7 p.134; calculator pp.31–33</a:t>
+              <a:t>Textbook sections 8.6 pp.201–203; sections 8.7 pp.203–204; calculator pp.51–53</a:t>
             </a:r>
           </a:p>
         </p:txBody>
@@ -6903,7 +6903,7 @@
                 </a:solidFill>
                 <a:latin typeface="Arial"/>
               </a:rPr>
-              <a:t>Resources: Exercise Book 8A Q23–24 (p.52); 8B Q6,13 (pp.53–54); 8C Q1–4 (p.55)</a:t>
+              <a:t>Resources: Exercise Book 8A Q23–24 (p.78); 8B Q6,13 (pp.79–80); 8C Q1–4 (p.81)</a:t>
             </a:r>
           </a:p>
         </p:txBody>
@@ -7517,7 +7517,7 @@
                 </a:solidFill>
                 <a:latin typeface="Arial"/>
               </a:rPr>
-              <a:t>Textbook sections 8.6 pp.131–133; sections 8.7 p.134; calculator pp.31–33</a:t>
+              <a:t>Textbook sections 8.6 pp.201–203; sections 8.7 pp.203–204; calculator pp.51–53</a:t>
             </a:r>
           </a:p>
         </p:txBody>
@@ -8293,7 +8293,7 @@
                 </a:solidFill>
                 <a:latin typeface="Arial"/>
               </a:rPr>
-              <a:t>Textbook sections 8.6 pp.131–133; sections 8.7 p.134; calculator pp.31–33</a:t>
+              <a:t>Textbook sections 8.6 pp.201–203; sections 8.7 pp.203–204; calculator pp.51–53</a:t>
             </a:r>
           </a:p>
         </p:txBody>
@@ -9252,7 +9252,7 @@
                 </a:solidFill>
                 <a:latin typeface="Arial"/>
               </a:rPr>
-              <a:t>Textbook sections 8.6 pp.131–133; sections 8.7 p.134; calculator pp.31–33</a:t>
+              <a:t>Textbook sections 8.6 pp.201–203; sections 8.7 pp.203–204; calculator pp.51–53</a:t>
             </a:r>
           </a:p>
         </p:txBody>
@@ -9963,7 +9963,7 @@
                 </a:solidFill>
                 <a:latin typeface="Arial"/>
               </a:rPr>
-              <a:t>Textbook sections 8.6 pp.131–133; sections 8.7 p.134; calculator pp.31–33</a:t>
+              <a:t>Textbook sections 8.6 pp.201–203; sections 8.7 pp.203–204; calculator pp.51–53</a:t>
             </a:r>
           </a:p>
         </p:txBody>
@@ -10650,7 +10650,7 @@
                 </a:solidFill>
                 <a:latin typeface="Arial"/>
               </a:rPr>
-              <a:t>Textbook sections 8.6 pp.131–133; sections 8.7 p.134; calculator pp.31–33</a:t>
+              <a:t>Textbook sections 8.6 pp.201–203; sections 8.7 pp.203–204; calculator pp.51–53</a:t>
             </a:r>
           </a:p>
         </p:txBody>
@@ -10850,7 +10850,7 @@
                 </a:solidFill>
                 <a:latin typeface="Arial"/>
               </a:rPr>
-              <a:t>Resources: Exercise Book 8A Q23–24 (p.52); 8B Q6,13 (pp.53–54); 8C Q1–4 (p.55)</a:t>
+              <a:t>Resources: Exercise Book 8A Q23–24 (p.78); 8B Q6,13 (pp.79–80); 8C Q1–4 (p.81)</a:t>
             </a:r>
           </a:p>
         </p:txBody>
@@ -13447,7 +13447,7 @@
                 </a:solidFill>
                 <a:latin typeface="Arial"/>
               </a:rPr>
-              <a:t>Textbook sections 8.6 pp.131–133; sections 8.7 p.134; calculator pp.31–33</a:t>
+              <a:t>Textbook sections 8.6 pp.201–203; sections 8.7 pp.203–204; calculator pp.51–53</a:t>
             </a:r>
           </a:p>
         </p:txBody>
@@ -14134,7 +14134,7 @@
                 </a:solidFill>
                 <a:latin typeface="Arial"/>
               </a:rPr>
-              <a:t>Textbook sections 8.6 pp.131–133; sections 8.7 p.134; calculator pp.31–33</a:t>
+              <a:t>Textbook sections 8.6 pp.201–203; sections 8.7 pp.203–204; calculator pp.51–53</a:t>
             </a:r>
           </a:p>
         </p:txBody>
@@ -14821,7 +14821,7 @@
                 </a:solidFill>
                 <a:latin typeface="Arial"/>
               </a:rPr>
-              <a:t>Textbook sections 8.6 pp.131–133; sections 8.7 p.134; calculator pp.31–33</a:t>
+              <a:t>Textbook sections 8.6 pp.201–203; sections 8.7 pp.203–204; calculator pp.51–53</a:t>
             </a:r>
           </a:p>
         </p:txBody>
@@ -15021,7 +15021,7 @@
                 </a:solidFill>
                 <a:latin typeface="Arial"/>
               </a:rPr>
-              <a:t>Resources: Exercise Book 8A Q23–24 (p.52); 8B Q6,13 (pp.53–54); 8C Q1–4 (p.55)</a:t>
+              <a:t>Resources: Exercise Book 8A Q23–24 (p.78); 8B Q6,13 (pp.79–80); 8C Q1–4 (p.81)</a:t>
             </a:r>
           </a:p>
         </p:txBody>
@@ -15590,7 +15590,7 @@
                 </a:solidFill>
                 <a:latin typeface="Arial"/>
               </a:rPr>
-              <a:t>Textbook sections 8.6 pp.131–133; sections 8.7 p.134; calculator pp.31–33</a:t>
+              <a:t>Textbook sections 8.6 pp.201–203; sections 8.7 pp.203–204; calculator pp.51–53</a:t>
             </a:r>
           </a:p>
         </p:txBody>
@@ -15790,7 +15790,7 @@
                 </a:solidFill>
                 <a:latin typeface="Arial"/>
               </a:rPr>
-              <a:t>Textbook sections 8.6 pp.131–133; sections 8.7 p.134; calculator pp.31–33</a:t>
+              <a:t>Textbook sections 8.6 pp.201–203; sections 8.7 pp.203–204; calculator pp.51–53</a:t>
             </a:r>
           </a:p>
         </p:txBody>
@@ -15838,7 +15838,7 @@
                 </a:solidFill>
                 <a:latin typeface="Arial"/>
               </a:rPr>
-              <a:t>Exercise Book 8A Q23–24 (p.52); 8B Q6,13 (pp.53–54); 8C Q1–4 (p.55)</a:t>
+              <a:t>Exercise Book 8A Q23–24 (p.78); 8B Q6,13 (pp.79–80); 8C Q1–4 (p.81)</a:t>
             </a:r>
           </a:p>
         </p:txBody>
@@ -16500,7 +16500,7 @@
                 </a:solidFill>
                 <a:latin typeface="Arial"/>
               </a:rPr>
-              <a:t>Textbook sections 8.6 pp.131–133; sections 8.7 p.134; calculator pp.31–33</a:t>
+              <a:t>Textbook sections 8.6 pp.201–203; sections 8.7 pp.203–204; calculator pp.51–53</a:t>
             </a:r>
           </a:p>
         </p:txBody>
@@ -16700,7 +16700,7 @@
                 </a:solidFill>
                 <a:latin typeface="Arial"/>
               </a:rPr>
-              <a:t>Resources: Exercise Book 8A Q23–24 (p.52); 8B Q6,13 (pp.53–54); 8C Q1–4 (p.55)</a:t>
+              <a:t>Resources: Exercise Book 8A Q23–24 (p.78); 8B Q6,13 (pp.79–80); 8C Q1–4 (p.81)</a:t>
             </a:r>
           </a:p>
         </p:txBody>
@@ -17449,7 +17449,7 @@
                 </a:solidFill>
                 <a:latin typeface="Arial"/>
               </a:rPr>
-              <a:t>Textbook sections 8.6 pp.131–133; sections 8.7 p.134; calculator pp.31–33</a:t>
+              <a:t>Textbook sections 8.6 pp.201–203; sections 8.7 pp.203–204; calculator pp.51–53</a:t>
             </a:r>
           </a:p>
         </p:txBody>
@@ -18694,7 +18694,7 @@
                 </a:solidFill>
                 <a:latin typeface="Arial"/>
               </a:rPr>
-              <a:t>Textbook sections 8.6 pp.131–133; sections 8.7 p.134; calculator pp.31–33</a:t>
+              <a:t>Textbook sections 8.6 pp.201–203; sections 8.7 pp.203–204; calculator pp.51–53</a:t>
             </a:r>
           </a:p>
         </p:txBody>
@@ -20151,7 +20151,7 @@
                 <a:ea typeface="Arial" pitchFamily="34" charset="-122"/>
                 <a:cs typeface="Arial" pitchFamily="34" charset="-120"/>
               </a:rPr>
-              <a:t>Textbook pp.131–134 • Exercise Book 8C Q1–2 p.55 • Units change from square units to length units</a:t>
+              <a:t>Textbook pp.200–204 • Exercise Book 8C Q1–2 p.81 • Units change from square units to length units</a:t>
             </a:r>
             <a:endParaRPr lang="en-US" sz="1050" dirty="0"/>
           </a:p>
@@ -20723,7 +20723,7 @@
                 </a:solidFill>
                 <a:latin typeface="Arial"/>
               </a:rPr>
-              <a:t>Textbook  |  page 132</a:t>
+              <a:t>Textbook  |  page 201</a:t>
             </a:r>
           </a:p>
         </p:txBody>
@@ -20771,7 +20771,7 @@
                 </a:solidFill>
                 <a:latin typeface="Arial"/>
               </a:rPr>
-              <a:t>Textbook sections 8.6 pp.131–133; sections 8.7 p.134; calculator pp.31–33</a:t>
+              <a:t>Textbook sections 8.6 pp.201–203; sections 8.7 pp.203–204; calculator pp.51–53</a:t>
             </a:r>
           </a:p>
         </p:txBody>
@@ -20843,7 +20843,7 @@
                 </a:solidFill>
                 <a:latin typeface="Arial"/>
               </a:rPr>
-              <a:t>Textbook p.132 • Figure 8.3 — Square side length and area</a:t>
+              <a:t>Textbook p.201 • Figure 8.3 — Square side length and area</a:t>
             </a:r>
           </a:p>
         </p:txBody>
@@ -21409,7 +21409,7 @@
                 </a:solidFill>
                 <a:latin typeface="Arial"/>
               </a:rPr>
-              <a:t>Textbook  |  page 131</a:t>
+              <a:t>Textbook  |  page 201</a:t>
             </a:r>
           </a:p>
         </p:txBody>
@@ -21457,7 +21457,7 @@
                 </a:solidFill>
                 <a:latin typeface="Arial"/>
               </a:rPr>
-              <a:t>Textbook sections 8.6 pp.131–133; sections 8.7 p.134; calculator pp.31–33</a:t>
+              <a:t>Textbook sections 8.6 pp.201–203; sections 8.7 pp.203–204; calculator pp.51–53</a:t>
             </a:r>
           </a:p>
         </p:txBody>
@@ -21529,7 +21529,7 @@
                 </a:solidFill>
                 <a:latin typeface="Arial"/>
               </a:rPr>
-              <a:t>Textbook p.131 • Example 8.11 — Find a square side using a square root</a:t>
+              <a:t>Textbook p.201 • Example 8.11 — Find a square side using a square root</a:t>
             </a:r>
           </a:p>
         </p:txBody>

--- a/carpentry/intake-142/PowerPoint/Day-16_2026-11-26_Week-5.pptx
+++ b/carpentry/intake-142/PowerPoint/Day-16_2026-11-26_Week-5.pptx
@@ -15290,6 +15290,104 @@
                 <a:latin typeface="Arial"/>
               </a:rPr>
               <a:t>Day 16  •  2026-11-26  •  22</a:t>
+            </a:r>
+          </a:p>
+        </p:txBody>
+      </p:sp>
+      <p:sp>
+        <p:nvSpPr>
+          <p:cNvPr id="22" name="Play quiz W05-L05"/>
+          <p:cNvSpPr txBox="1"/>
+          <p:nvPr/>
+        </p:nvSpPr>
+        <p:spPr>
+          <a:xfrm>
+            <a:off x="6355080" y="6606540"/>
+            <a:ext cx="822960" cy="210312"/>
+          </a:xfrm>
+          <a:prstGeom prst="rect">
+            <a:avLst/>
+          </a:prstGeom>
+          <a:noFill/>
+        </p:spPr>
+        <p:txBody>
+          <a:bodyPr wrap="square" lIns="0" rIns="0" tIns="0" bIns="0" anchor="t">
+            <a:normAutofit fontScale="100000" lnSpcReduction="0"/>
+          </a:bodyPr>
+          <a:lstStyle/>
+          <a:p>
+            <a:pPr>
+              <a:spcBef>
+                <a:spcPts val="0"/>
+              </a:spcBef>
+              <a:spcAft>
+                <a:spcPts val="0"/>
+              </a:spcAft>
+              <a:defRPr sz="1000" b="0">
+                <a:solidFill>
+                  <a:srgbClr val="D0002B"/>
+                </a:solidFill>
+                <a:latin typeface="Arial"/>
+              </a:defRPr>
+            </a:pPr>
+            <a:r>
+              <a:rPr sz="1000">
+                <a:solidFill>
+                  <a:srgbClr val="F7F8FC"/>
+                </a:solidFill>
+                <a:latin typeface="Arial"/>
+                <a:hlinkClick r:id="rId8"/>
+              </a:rPr>
+              <a:t>Play quiz</a:t>
+            </a:r>
+          </a:p>
+        </p:txBody>
+      </p:sp>
+      <p:sp>
+        <p:nvSpPr>
+          <p:cNvPr id="23" name="Quiz PDF W05-L05"/>
+          <p:cNvSpPr txBox="1"/>
+          <p:nvPr/>
+        </p:nvSpPr>
+        <p:spPr>
+          <a:xfrm>
+            <a:off x="7296912" y="6606540"/>
+            <a:ext cx="1005840" cy="210312"/>
+          </a:xfrm>
+          <a:prstGeom prst="rect">
+            <a:avLst/>
+          </a:prstGeom>
+          <a:noFill/>
+        </p:spPr>
+        <p:txBody>
+          <a:bodyPr wrap="square" lIns="0" rIns="0" tIns="0" bIns="0" anchor="t">
+            <a:normAutofit fontScale="100000" lnSpcReduction="0"/>
+          </a:bodyPr>
+          <a:lstStyle/>
+          <a:p>
+            <a:pPr>
+              <a:spcBef>
+                <a:spcPts val="0"/>
+              </a:spcBef>
+              <a:spcAft>
+                <a:spcPts val="0"/>
+              </a:spcAft>
+              <a:defRPr sz="1000" b="0">
+                <a:solidFill>
+                  <a:srgbClr val="D0002B"/>
+                </a:solidFill>
+                <a:latin typeface="Arial"/>
+              </a:defRPr>
+            </a:pPr>
+            <a:r>
+              <a:rPr sz="1000">
+                <a:solidFill>
+                  <a:srgbClr val="F7F8FC"/>
+                </a:solidFill>
+                <a:latin typeface="Arial"/>
+                <a:hlinkClick r:id="rId9"/>
+              </a:rPr>
+              <a:t>Quiz PDF</a:t>
             </a:r>
           </a:p>
         </p:txBody>
